--- a/smoke_samples/16_prelude_helpers.pptx
+++ b/smoke_samples/16_prelude_helpers.pptx
@@ -327,14 +327,14 @@
           <a:noFill/>
         </p:spPr>
         <p:txBody>
-          <a:bodyPr wrap="square" rtlCol="0"/>
+          <a:bodyPr wrap="square" rtlCol="0" anchor="t"/>
           <a:lstStyle/>
           <a:p>
             <a:pPr lvl="0" marL="457200" indent="-457200">
               <a:buChar char="•"/>
             </a:pPr>
             <a:r>
-              <a:rPr lang="en-US" sz="2800" b="0" i="0" u="none" dirty="0"/>
+              <a:rPr lang="en-US" sz="1800" b="0" i="0" u="none" dirty="0"/>
               <a:t>Fluent PresentationBuilder API</a:t>
             </a:r>
           </a:p>
@@ -343,7 +343,7 @@
               <a:buChar char="•"/>
             </a:pPr>
             <a:r>
-              <a:rPr lang="en-US" sz="2800" b="0" i="0" u="none" dirty="0"/>
+              <a:rPr lang="en-US" sz="1800" b="0" i="0" u="none" dirty="0"/>
               <a:t>One-line Title/Bullet/Shapes slides</a:t>
             </a:r>
           </a:p>
@@ -352,7 +352,7 @@
               <a:buChar char="•"/>
             </a:pPr>
             <a:r>
-              <a:rPr lang="en-US" sz="2800" b="0" i="0" u="none" dirty="0"/>
+              <a:rPr lang="en-US" sz="1800" b="0" i="0" u="none" dirty="0"/>
               <a:t>Overflow-protected unit converters</a:t>
             </a:r>
           </a:p>
@@ -361,8 +361,8 @@
               <a:buChar char="•"/>
             </a:pPr>
             <a:r>
-              <a:rPr lang="en-US" sz="2800" b="0" i="0" u="none" dirty="0"/>
-              <a:t>Hundredthsndths of a point font size helper</a:t>
+              <a:rPr lang="en-US" sz="1800" b="0" i="0" u="none" dirty="0"/>
+              <a:t>Hundredths of a point font size helper</a:t>
             </a:r>
           </a:p>
         </p:txBody>

--- a/smoke_samples/16_prelude_helpers.pptx
+++ b/smoke_samples/16_prelude_helpers.pptx
@@ -205,11 +205,6 @@
 <file path=ppt/slides/slide1.xml><?xml version="1.0" encoding="utf-8"?>
 <p:sld xmlns:a="http://schemas.openxmlformats.org/drawingml/2006/main" xmlns:c="http://schemas.openxmlformats.org/drawingml/2006/chart" xmlns:r="http://schemas.openxmlformats.org/officeDocument/2006/relationships" xmlns:p="http://schemas.openxmlformats.org/presentationml/2006/main">
   <p:cSld>
-    <p:bg>
-      <p:bgRef idx="1001">
-        <a:schemeClr val="bg1"/>
-      </p:bgRef>
-    </p:bg>
     <p:spTree>
       <p:nvGrpSpPr>
         <p:cNvPr id="1" name=""/>
@@ -263,11 +258,6 @@
 <file path=ppt/slides/slide2.xml><?xml version="1.0" encoding="utf-8"?>
 <p:sld xmlns:a="http://schemas.openxmlformats.org/drawingml/2006/main" xmlns:c="http://schemas.openxmlformats.org/drawingml/2006/chart" xmlns:r="http://schemas.openxmlformats.org/officeDocument/2006/relationships" xmlns:p="http://schemas.openxmlformats.org/presentationml/2006/main">
   <p:cSld>
-    <p:bg>
-      <p:bgRef idx="1001">
-        <a:schemeClr val="bg1"/>
-      </p:bgRef>
-    </p:bg>
     <p:spTree>
       <p:nvGrpSpPr>
         <p:cNvPr id="1" name=""/>
@@ -378,11 +368,6 @@
 <file path=ppt/slides/slide3.xml><?xml version="1.0" encoding="utf-8"?>
 <p:sld xmlns:a="http://schemas.openxmlformats.org/drawingml/2006/main" xmlns:c="http://schemas.openxmlformats.org/drawingml/2006/chart" xmlns:r="http://schemas.openxmlformats.org/officeDocument/2006/relationships" xmlns:p="http://schemas.openxmlformats.org/presentationml/2006/main">
   <p:cSld>
-    <p:bg>
-      <p:bgRef idx="1001">
-        <a:schemeClr val="bg1"/>
-      </p:bgRef>
-    </p:bg>
     <p:spTree>
       <p:nvGrpSpPr>
         <p:cNvPr id="1" name=""/>
@@ -449,7 +434,7 @@
           </a:bodyPr>
           <a:lstStyle/>
           <a:p>
-            <a:pPr algn="ctr"/>
+            <a:pPr algn="l"/>
             <a:r>
               <a:rPr lang="en-US" sz="3600" b="0" i="0" u="none" dirty="0">
                 <a:solidFill>
@@ -485,7 +470,7 @@
           </a:bodyPr>
           <a:lstStyle/>
           <a:p>
-            <a:pPr algn="ctr"/>
+            <a:pPr algn="l"/>
             <a:r>
               <a:rPr lang="en-US" sz="3600" b="0" i="0" u="none" dirty="0">
                 <a:solidFill>
@@ -521,7 +506,7 @@
           </a:bodyPr>
           <a:lstStyle/>
           <a:p>
-            <a:pPr algn="ctr"/>
+            <a:pPr algn="l"/>
             <a:r>
               <a:rPr lang="en-US" sz="3600" b="0" i="0" u="none" dirty="0">
                 <a:solidFill>
@@ -557,7 +542,7 @@
           </a:bodyPr>
           <a:lstStyle/>
           <a:p>
-            <a:pPr algn="ctr"/>
+            <a:pPr algn="l"/>
             <a:r>
               <a:rPr lang="en-US" sz="1000" b="0" i="0" u="none" dirty="0">
                 <a:solidFill>
@@ -593,7 +578,7 @@
           </a:bodyPr>
           <a:lstStyle/>
           <a:p>
-            <a:pPr algn="ctr"/>
+            <a:pPr algn="l"/>
             <a:r>
               <a:rPr lang="en-US" sz="1000" b="0" i="0" u="none" dirty="0">
                 <a:solidFill>
@@ -616,11 +601,6 @@
 <file path=ppt/slides/slide4.xml><?xml version="1.0" encoding="utf-8"?>
 <p:sld xmlns:a="http://schemas.openxmlformats.org/drawingml/2006/main" xmlns:c="http://schemas.openxmlformats.org/drawingml/2006/chart" xmlns:r="http://schemas.openxmlformats.org/officeDocument/2006/relationships" xmlns:p="http://schemas.openxmlformats.org/presentationml/2006/main">
   <p:cSld>
-    <p:bg>
-      <p:bgRef idx="1001">
-        <a:schemeClr val="bg1"/>
-      </p:bgRef>
-    </p:bg>
     <p:spTree>
       <p:nvGrpSpPr>
         <p:cNvPr id="1" name=""/>
@@ -685,7 +665,7 @@
           </a:bodyPr>
           <a:lstStyle/>
           <a:p>
-            <a:pPr algn="ctr"/>
+            <a:pPr algn="l"/>
             <a:r>
               <a:rPr lang="en-US" sz="2000" b="0" i="0" u="none" dirty="0">
                 <a:solidFill>
@@ -719,7 +699,7 @@
           </a:bodyPr>
           <a:lstStyle/>
           <a:p>
-            <a:pPr algn="ctr"/>
+            <a:pPr algn="l"/>
             <a:r>
               <a:rPr lang="en-US" sz="3000" b="0" i="0" u="none" dirty="0">
                 <a:solidFill>
@@ -753,7 +733,7 @@
           </a:bodyPr>
           <a:lstStyle/>
           <a:p>
-            <a:pPr algn="ctr"/>
+            <a:pPr algn="l"/>
             <a:r>
               <a:rPr lang="en-US" sz="3000" b="0" i="0" u="none" dirty="0">
                 <a:solidFill>
@@ -787,7 +767,7 @@
           </a:bodyPr>
           <a:lstStyle/>
           <a:p>
-            <a:pPr algn="ctr"/>
+            <a:pPr algn="l"/>
             <a:r>
               <a:rPr lang="en-US" sz="2000" b="0" i="0" u="none" dirty="0">
                 <a:solidFill>
@@ -821,7 +801,7 @@
           </a:bodyPr>
           <a:lstStyle/>
           <a:p>
-            <a:pPr algn="ctr"/>
+            <a:pPr algn="l"/>
             <a:r>
               <a:rPr lang="en-US" sz="2000" b="0" i="0" u="none" dirty="0">
                 <a:solidFill>
@@ -844,11 +824,6 @@
 <file path=ppt/slides/slide5.xml><?xml version="1.0" encoding="utf-8"?>
 <p:sld xmlns:a="http://schemas.openxmlformats.org/drawingml/2006/main" xmlns:c="http://schemas.openxmlformats.org/drawingml/2006/chart" xmlns:r="http://schemas.openxmlformats.org/officeDocument/2006/relationships" xmlns:p="http://schemas.openxmlformats.org/presentationml/2006/main">
   <p:cSld>
-    <p:bg>
-      <p:bgRef idx="1001">
-        <a:schemeClr val="bg1"/>
-      </p:bgRef>
-    </p:bg>
     <p:spTree>
       <p:nvGrpSpPr>
         <p:cNvPr id="1" name=""/>
@@ -913,7 +888,7 @@
           </a:bodyPr>
           <a:lstStyle/>
           <a:p>
-            <a:pPr algn="ctr"/>
+            <a:pPr algn="l"/>
             <a:r>
               <a:rPr lang="en-US" sz="1000" b="0" i="0" u="none" dirty="0">
                 <a:solidFill>
@@ -947,7 +922,7 @@
           </a:bodyPr>
           <a:lstStyle/>
           <a:p>
-            <a:pPr algn="ctr"/>
+            <a:pPr algn="l"/>
             <a:r>
               <a:rPr lang="en-US" sz="3100" b="0" i="0" u="none" dirty="0">
                 <a:solidFill>
@@ -968,9 +943,9 @@
 </file>
 
 <file path=ppt/theme/theme1.xml><?xml version="1.0" encoding="utf-8"?>
-<a:theme xmlns:a="http://schemas.openxmlformats.org/drawingml/2006/main" name="Office Theme">
+<a:theme xmlns:a="http://schemas.openxmlformats.org/drawingml/2006/main" name="Office Theme marketing">
   <a:themeElements>
-    <a:clrScheme name="Office">
+    <a:clrScheme name="Office colors">
       <a:dk1>
         <a:sysClr val="windowText" lastClr="000000"/>
       </a:dk1>
@@ -1008,7 +983,7 @@
         <a:srgbClr val="800080"/>
       </a:folHlink>
     </a:clrScheme>
-    <a:fontScheme name="Office">
+    <a:fontScheme name="Office fonts">
       <a:majorFont>
         <a:latin typeface="Calibri"/>
         <a:ea typeface=""/>
